--- a/Atrosage_analysis_Vikas.pptx
+++ b/Atrosage_analysis_Vikas.pptx
@@ -35,40 +35,40 @@
   <p:notesSz cx="6858000" cy="9144000"/>
   <p:embeddedFontLst>
     <p:embeddedFont>
-      <p:font typeface="Comfortaa SemiBold" panose="020B0604020202020204" charset="0"/>
+      <p:font typeface="Calibri" panose="020F0502020204030204" pitchFamily="34" charset="0"/>
       <p:regular r:id="rId25"/>
       <p:bold r:id="rId26"/>
+      <p:italic r:id="rId27"/>
+      <p:boldItalic r:id="rId28"/>
+    </p:embeddedFont>
+    <p:embeddedFont>
+      <p:font typeface="Comfortaa SemiBold" panose="020B0604020202020204" charset="0"/>
+      <p:regular r:id="rId29"/>
+      <p:bold r:id="rId30"/>
+    </p:embeddedFont>
+    <p:embeddedFont>
+      <p:font typeface="Comfortaa Medium" panose="020B0604020202020204" charset="0"/>
+      <p:regular r:id="rId31"/>
+      <p:bold r:id="rId32"/>
+    </p:embeddedFont>
+    <p:embeddedFont>
+      <p:font typeface="Quantico" panose="020B0604020202020204" charset="0"/>
+      <p:regular r:id="rId33"/>
+      <p:bold r:id="rId34"/>
+      <p:italic r:id="rId35"/>
+      <p:boldItalic r:id="rId36"/>
+    </p:embeddedFont>
+    <p:embeddedFont>
+      <p:font typeface="Comfortaa" panose="020B0604020202020204" charset="0"/>
+      <p:regular r:id="rId37"/>
+      <p:bold r:id="rId38"/>
     </p:embeddedFont>
     <p:embeddedFont>
       <p:font typeface="Lato" panose="020B0604020202020204" charset="0"/>
-      <p:regular r:id="rId27"/>
-      <p:bold r:id="rId28"/>
-      <p:italic r:id="rId29"/>
-      <p:boldItalic r:id="rId30"/>
-    </p:embeddedFont>
-    <p:embeddedFont>
-      <p:font typeface="Quantico" panose="020B0604020202020204" charset="0"/>
-      <p:regular r:id="rId31"/>
-      <p:bold r:id="rId32"/>
-      <p:italic r:id="rId33"/>
-      <p:boldItalic r:id="rId34"/>
-    </p:embeddedFont>
-    <p:embeddedFont>
-      <p:font typeface="Comfortaa Medium" panose="020B0604020202020204" charset="0"/>
-      <p:regular r:id="rId35"/>
-      <p:bold r:id="rId36"/>
-    </p:embeddedFont>
-    <p:embeddedFont>
-      <p:font typeface="Calibri" panose="020F0502020204030204" pitchFamily="34" charset="0"/>
-      <p:regular r:id="rId37"/>
-      <p:bold r:id="rId38"/>
-      <p:italic r:id="rId39"/>
-      <p:boldItalic r:id="rId40"/>
-    </p:embeddedFont>
-    <p:embeddedFont>
-      <p:font typeface="Comfortaa" panose="020B0604020202020204" charset="0"/>
-      <p:regular r:id="rId41"/>
-      <p:bold r:id="rId42"/>
+      <p:regular r:id="rId39"/>
+      <p:bold r:id="rId40"/>
+      <p:italic r:id="rId41"/>
+      <p:boldItalic r:id="rId42"/>
     </p:embeddedFont>
   </p:embeddedFontLst>
   <p:defaultTextStyle>
@@ -316,7 +316,7 @@
       </p15:sldGuideLst>
     </p:ext>
     <p:ext uri="GoogleSlidesCustomDataVersion2">
-      <go:slidesCustomData xmlns="" xmlns:mc="http://schemas.openxmlformats.org/markup-compatibility/2006" xmlns:mv="urn:schemas-microsoft-com:mac:vml" xmlns:c="http://schemas.openxmlformats.org/drawingml/2006/chart" xmlns:dgm="http://schemas.openxmlformats.org/drawingml/2006/diagram" xmlns:o="urn:schemas-microsoft-com:office:office" xmlns:v="urn:schemas-microsoft-com:vml" xmlns:pvml="urn:schemas-microsoft-com:office:powerpoint" xmlns:com="http://schemas.openxmlformats.org/drawingml/2006/compatibility" xmlns:p14="http://schemas.microsoft.com/office/powerpoint/2010/main" xmlns:p15="http://schemas.microsoft.com/office/powerpoint/2012/main" xmlns:ahyp="http://schemas.microsoft.com/office/drawing/2018/hyperlinkcolor" xmlns:go="http://customooxmlschemas.google.com/" r:id="rId43" roundtripDataSignature="AMtx7mj3APmJogSGUPVi2c7l8QqEdQmbew=="/>
+      <go:slidesCustomData xmlns:go="http://customooxmlschemas.google.com/" xmlns:ahyp="http://schemas.microsoft.com/office/drawing/2018/hyperlinkcolor" xmlns:p15="http://schemas.microsoft.com/office/powerpoint/2012/main" xmlns:p14="http://schemas.microsoft.com/office/powerpoint/2010/main" xmlns:com="http://schemas.openxmlformats.org/drawingml/2006/compatibility" xmlns:pvml="urn:schemas-microsoft-com:office:powerpoint" xmlns:v="urn:schemas-microsoft-com:vml" xmlns:o="urn:schemas-microsoft-com:office:office" xmlns:dgm="http://schemas.openxmlformats.org/drawingml/2006/diagram" xmlns:c="http://schemas.openxmlformats.org/drawingml/2006/chart" xmlns:mv="urn:schemas-microsoft-com:mac:vml" xmlns:mc="http://schemas.openxmlformats.org/markup-compatibility/2006" xmlns="" r:id="rId43" roundtripDataSignature="AMtx7mj3APmJogSGUPVi2c7l8QqEdQmbew=="/>
     </p:ext>
   </p:extLst>
 </p:presentation>
@@ -4853,7 +4853,6 @@
           <c:dLbls>
             <c:dLbl>
               <c:idx val="0"/>
-              <c:layout/>
               <c:tx>
                 <c:rich>
                   <a:bodyPr/>
@@ -4876,7 +4875,6 @@
               <c:showBubbleSize val="0"/>
               <c:extLst>
                 <c:ext xmlns:c15="http://schemas.microsoft.com/office/drawing/2012/chart" uri="{CE6537A1-D6FC-4f65-9D91-7224C49458BB}">
-                  <c15:layout/>
                   <c15:dlblFieldTable/>
                   <c15:showDataLabelsRange val="0"/>
                 </c:ext>
@@ -4887,7 +4885,6 @@
             </c:dLbl>
             <c:dLbl>
               <c:idx val="1"/>
-              <c:layout/>
               <c:tx>
                 <c:rich>
                   <a:bodyPr/>
@@ -4910,7 +4907,6 @@
               <c:showBubbleSize val="0"/>
               <c:extLst>
                 <c:ext xmlns:c15="http://schemas.microsoft.com/office/drawing/2012/chart" uri="{CE6537A1-D6FC-4f65-9D91-7224C49458BB}">
-                  <c15:layout/>
                   <c15:dlblFieldTable/>
                   <c15:showDataLabelsRange val="0"/>
                 </c:ext>
@@ -4921,7 +4917,6 @@
             </c:dLbl>
             <c:dLbl>
               <c:idx val="2"/>
-              <c:layout/>
               <c:tx>
                 <c:rich>
                   <a:bodyPr/>
@@ -4944,7 +4939,6 @@
               <c:showBubbleSize val="0"/>
               <c:extLst>
                 <c:ext xmlns:c15="http://schemas.microsoft.com/office/drawing/2012/chart" uri="{CE6537A1-D6FC-4f65-9D91-7224C49458BB}">
-                  <c15:layout/>
                   <c15:dlblFieldTable/>
                   <c15:showDataLabelsRange val="0"/>
                 </c:ext>
@@ -9832,7 +9826,7 @@
   <c:clrMapOvr bg1="lt1" tx1="dk1" bg2="lt2" tx2="dk2" accent1="accent1" accent2="accent2" accent3="accent3" accent4="accent4" accent5="accent5" accent6="accent6" hlink="hlink" folHlink="folHlink"/>
   <c:pivotSource>
     <c:name>[AstroSage_analysis_vikas.xlsx]Subjective!chat_status_pivot</c:name>
-    <c:fmtId val="14"/>
+    <c:fmtId val="20"/>
   </c:pivotSource>
   <c:chart>
     <c:title>
@@ -9855,7 +9849,7 @@
         <c:manualLayout>
           <c:xMode val="edge"/>
           <c:yMode val="edge"/>
-          <c:x val="0.64986716278259127"/>
+          <c:x val="0.37795747330954166"/>
           <c:y val="2.2267832148723445E-2"/>
         </c:manualLayout>
       </c:layout>
@@ -14467,7 +14461,7 @@
             <c:bubble3D val="0"/>
             <c:extLst>
               <c:ext xmlns:c16="http://schemas.microsoft.com/office/drawing/2014/chart" uri="{C3380CC4-5D6E-409C-BE32-E72D297353CC}">
-                <c16:uniqueId val="{00000000-9670-4583-A185-60502B708C97}"/>
+                <c16:uniqueId val="{00000000-F368-4EEC-89BF-C45C7301C3F2}"/>
               </c:ext>
             </c:extLst>
           </c:dPt>
@@ -14481,7 +14475,7 @@
             </c:spPr>
             <c:extLst>
               <c:ext xmlns:c16="http://schemas.microsoft.com/office/drawing/2014/chart" uri="{C3380CC4-5D6E-409C-BE32-E72D297353CC}">
-                <c16:uniqueId val="{00000002-9670-4583-A185-60502B708C97}"/>
+                <c16:uniqueId val="{00000002-F368-4EEC-89BF-C45C7301C3F2}"/>
               </c:ext>
             </c:extLst>
           </c:dPt>
@@ -14497,7 +14491,7 @@
             </c:spPr>
             <c:extLst>
               <c:ext xmlns:c16="http://schemas.microsoft.com/office/drawing/2014/chart" uri="{C3380CC4-5D6E-409C-BE32-E72D297353CC}">
-                <c16:uniqueId val="{00000004-9670-4583-A185-60502B708C97}"/>
+                <c16:uniqueId val="{00000004-F368-4EEC-89BF-C45C7301C3F2}"/>
               </c:ext>
             </c:extLst>
           </c:dPt>
@@ -14513,7 +14507,7 @@
             </c:spPr>
             <c:extLst>
               <c:ext xmlns:c16="http://schemas.microsoft.com/office/drawing/2014/chart" uri="{C3380CC4-5D6E-409C-BE32-E72D297353CC}">
-                <c16:uniqueId val="{00000006-9670-4583-A185-60502B708C97}"/>
+                <c16:uniqueId val="{00000006-F368-4EEC-89BF-C45C7301C3F2}"/>
               </c:ext>
             </c:extLst>
           </c:dPt>
@@ -14529,7 +14523,7 @@
             </c:spPr>
             <c:extLst>
               <c:ext xmlns:c16="http://schemas.microsoft.com/office/drawing/2014/chart" uri="{C3380CC4-5D6E-409C-BE32-E72D297353CC}">
-                <c16:uniqueId val="{00000008-9670-4583-A185-60502B708C97}"/>
+                <c16:uniqueId val="{00000008-F368-4EEC-89BF-C45C7301C3F2}"/>
               </c:ext>
             </c:extLst>
           </c:dPt>
@@ -14553,7 +14547,7 @@
             </c:spPr>
             <c:extLst>
               <c:ext xmlns:c16="http://schemas.microsoft.com/office/drawing/2014/chart" uri="{C3380CC4-5D6E-409C-BE32-E72D297353CC}">
-                <c16:uniqueId val="{0000000A-9670-4583-A185-60502B708C97}"/>
+                <c16:uniqueId val="{0000000A-F368-4EEC-89BF-C45C7301C3F2}"/>
               </c:ext>
             </c:extLst>
           </c:dPt>
@@ -14596,7 +14590,7 @@
                   <c15:layout/>
                 </c:ext>
                 <c:ext xmlns:c16="http://schemas.microsoft.com/office/drawing/2014/chart" uri="{C3380CC4-5D6E-409C-BE32-E72D297353CC}">
-                  <c16:uniqueId val="{00000000-9670-4583-A185-60502B708C97}"/>
+                  <c16:uniqueId val="{00000000-F368-4EEC-89BF-C45C7301C3F2}"/>
                 </c:ext>
               </c:extLst>
             </c:dLbl>
@@ -14638,7 +14632,7 @@
                   <c15:layout/>
                 </c:ext>
                 <c:ext xmlns:c16="http://schemas.microsoft.com/office/drawing/2014/chart" uri="{C3380CC4-5D6E-409C-BE32-E72D297353CC}">
-                  <c16:uniqueId val="{00000002-9670-4583-A185-60502B708C97}"/>
+                  <c16:uniqueId val="{00000002-F368-4EEC-89BF-C45C7301C3F2}"/>
                 </c:ext>
               </c:extLst>
             </c:dLbl>
@@ -14680,7 +14674,7 @@
                   <c15:layout/>
                 </c:ext>
                 <c:ext xmlns:c16="http://schemas.microsoft.com/office/drawing/2014/chart" uri="{C3380CC4-5D6E-409C-BE32-E72D297353CC}">
-                  <c16:uniqueId val="{00000004-9670-4583-A185-60502B708C97}"/>
+                  <c16:uniqueId val="{00000004-F368-4EEC-89BF-C45C7301C3F2}"/>
                 </c:ext>
               </c:extLst>
             </c:dLbl>
@@ -14722,7 +14716,7 @@
                   <c15:layout/>
                 </c:ext>
                 <c:ext xmlns:c16="http://schemas.microsoft.com/office/drawing/2014/chart" uri="{C3380CC4-5D6E-409C-BE32-E72D297353CC}">
-                  <c16:uniqueId val="{00000006-9670-4583-A185-60502B708C97}"/>
+                  <c16:uniqueId val="{00000006-F368-4EEC-89BF-C45C7301C3F2}"/>
                 </c:ext>
               </c:extLst>
             </c:dLbl>
@@ -14769,7 +14763,7 @@
                   <c15:layout/>
                 </c:ext>
                 <c:ext xmlns:c16="http://schemas.microsoft.com/office/drawing/2014/chart" uri="{C3380CC4-5D6E-409C-BE32-E72D297353CC}">
-                  <c16:uniqueId val="{00000008-9670-4583-A185-60502B708C97}"/>
+                  <c16:uniqueId val="{00000008-F368-4EEC-89BF-C45C7301C3F2}"/>
                 </c:ext>
               </c:extLst>
             </c:dLbl>
@@ -14816,7 +14810,7 @@
                   <c15:layout/>
                 </c:ext>
                 <c:ext xmlns:c16="http://schemas.microsoft.com/office/drawing/2014/chart" uri="{C3380CC4-5D6E-409C-BE32-E72D297353CC}">
-                  <c16:uniqueId val="{0000000A-9670-4583-A185-60502B708C97}"/>
+                  <c16:uniqueId val="{0000000A-F368-4EEC-89BF-C45C7301C3F2}"/>
                 </c:ext>
               </c:extLst>
             </c:dLbl>
@@ -14906,7 +14900,7 @@
           </c:val>
           <c:extLst>
             <c:ext xmlns:c16="http://schemas.microsoft.com/office/drawing/2014/chart" uri="{C3380CC4-5D6E-409C-BE32-E72D297353CC}">
-              <c16:uniqueId val="{0000000B-9670-4583-A185-60502B708C97}"/>
+              <c16:uniqueId val="{0000000B-F368-4EEC-89BF-C45C7301C3F2}"/>
             </c:ext>
           </c:extLst>
         </c:ser>
@@ -46635,7 +46629,7 @@
       </p:sp>
       <p:graphicFrame>
         <p:nvGraphicFramePr>
-          <p:cNvPr id="5" name="Chart 4">
+          <p:cNvPr id="6" name="Chart 5">
             <a:extLst>
               <a:ext uri="{FF2B5EF4-FFF2-40B4-BE49-F238E27FC236}">
                 <a16:creationId xmlns:a16="http://schemas.microsoft.com/office/drawing/2014/main" id="{00000000-0008-0000-0000-00001C000000}"/>
@@ -46648,14 +46642,14 @@
           <p:nvPr>
             <p:extLst>
               <p:ext uri="{D42A27DB-BD31-4B8C-83A1-F6EECF244321}">
-                <p14:modId xmlns:p14="http://schemas.microsoft.com/office/powerpoint/2010/main" val="1022942440"/>
+                <p14:modId xmlns:p14="http://schemas.microsoft.com/office/powerpoint/2010/main" val="1353435996"/>
               </p:ext>
             </p:extLst>
           </p:nvPr>
         </p:nvGraphicFramePr>
         <p:xfrm>
-          <a:off x="425297" y="1228647"/>
-          <a:ext cx="3758576" cy="2257914"/>
+          <a:off x="767374" y="1379950"/>
+          <a:ext cx="3521754" cy="2139503"/>
         </p:xfrm>
         <a:graphic>
           <a:graphicData uri="http://schemas.openxmlformats.org/drawingml/2006/chart">
